--- a/pptx/ITI_Database_Course_Lesson_1_Introduction.pptx
+++ b/pptx/ITI_Database_Course_Lesson_1_Introduction.pptx
@@ -12576,7 +12576,25 @@
                 </a:solidFill>
                 <a:latin typeface="Calibri"/>
               </a:rPr>
-              <a:t>No fixed tables, rows or foreign keys. Each store uses a </a:t>
+              <a:t>Usually </a:t>
+            </a:r>
+            <a:r>
+              <a:rPr sz="3091" b="1" i="0" u="none">
+                <a:solidFill>
+                  <a:srgbClr val="334155"/>
+                </a:solidFill>
+                <a:latin typeface="Calibri"/>
+              </a:rPr>
+              <a:t>no fixed schema and no foreign keys</a:t>
+            </a:r>
+            <a:r>
+              <a:rPr sz="3091" b="0" i="0" u="none">
+                <a:solidFill>
+                  <a:srgbClr val="334155"/>
+                </a:solidFill>
+                <a:latin typeface="Calibri"/>
+              </a:rPr>
+              <a:t>. Each store uses a </a:t>
             </a:r>
             <a:r>
               <a:rPr sz="3091" b="1" i="0" u="none">
@@ -18105,7 +18123,7 @@
         <p:spPr>
           <a:xfrm>
             <a:off x="9525000" y="7810500"/>
-            <a:ext cx="7543800" cy="626554"/>
+            <a:ext cx="7543800" cy="922743"/>
           </a:xfrm>
           <a:prstGeom prst="rect">
             <a:avLst/>
@@ -18128,7 +18146,7 @@
                 </a:solidFill>
                 <a:latin typeface="Calibri"/>
               </a:rPr>
-              <a:t>Only the server runs the application; users need just a browser. The database is never exposed to the internet.</a:t>
+              <a:t>Only the server runs the application; users need just a browser. The database server stays behind the app server, off the public internet.</a:t>
             </a:r>
           </a:p>
         </p:txBody>
@@ -21385,7 +21403,7 @@
         <p:spPr>
           <a:xfrm>
             <a:off x="12432030" y="6829520"/>
-            <a:ext cx="4594859" cy="1584613"/>
+            <a:ext cx="4594859" cy="1969659"/>
           </a:xfrm>
           <a:prstGeom prst="rect">
             <a:avLst/>
@@ -21408,7 +21426,7 @@
                 </a:solidFill>
                 <a:latin typeface="Calibri"/>
               </a:rPr>
-              <a:t>Open db-fiddle.com (PostgreSQL), create a table and insert 3 rows. Which schema level did each statement touch?</a:t>
+              <a:t>Open db-fiddle.com (PostgreSQL) and run CREATE TABLE, then CREATE INDEX on one column. Which level of the three-schema architecture does each statement change?</a:t>
             </a:r>
           </a:p>
         </p:txBody>

--- a/pptx/ITI_Database_Course_Lesson_1_Introduction.pptx
+++ b/pptx/ITI_Database_Course_Lesson_1_Introduction.pptx
@@ -11880,7 +11880,7 @@
                 </a:solidFill>
                 <a:latin typeface="Calibri"/>
               </a:rPr>
-              <a:t>Why organizations moved from separate program files to a shared, managed database.</a:t>
+              <a:t>Why organizations moved from program files to a shared database, what a DBMS does, and who works with it.</a:t>
             </a:r>
           </a:p>
         </p:txBody>
@@ -23533,7 +23533,7 @@
                 </a:solidFill>
                 <a:latin typeface="Calibri"/>
               </a:rPr>
-              <a:t>Why organizations moved from separate program files to a shared, managed database.</a:t>
+              <a:t>Why organizations moved from program files to a shared database, what a DBMS does, and who works with it.</a:t>
             </a:r>
           </a:p>
         </p:txBody>
